--- a/TemplateScoutingsRapport.pptx
+++ b/TemplateScoutingsRapport.pptx
@@ -7263,7 +7263,7 @@
         <p:spPr>
           <a:xfrm>
             <a:off x="3560379" y="664557"/>
-            <a:ext cx="3041456" cy="1296788"/>
+            <a:ext cx="3041456" cy="625364"/>
           </a:xfrm>
           <a:prstGeom prst="rect">
             <a:avLst/>
@@ -7302,8 +7302,10 @@
           </a:lstStyle>
           <a:p>
             <a:r>
-              <a:t>First Lastname</a:t>
+              <a:rPr lang="nl-NL"/>
+              <a:t>{Name}</a:t>
             </a:r>
+            <a:endParaRPr/>
           </a:p>
         </p:txBody>
       </p:sp>
@@ -7585,14 +7587,7 @@
             <a:pPr defTabSz="914400"/>
             <a:r>
               <a:rPr lang="nl-NL"/>
-              <a:t>{</a:t>
-            </a:r>
-            <a:r>
-              <a:t>Country</a:t>
-            </a:r>
-            <a:r>
-              <a:rPr lang="nl-NL"/>
-              <a:t>}</a:t>
+              <a:t>{Nationalities}</a:t>
             </a:r>
             <a:endParaRPr/>
           </a:p>
@@ -8155,10 +8150,6 @@
           </a:lstStyle>
           <a:p>
             <a:pPr defTabSz="914400"/>
-            <a:r>
-              <a:rPr lang="nl-NL"/>
-              <a:t>{Career_m}</a:t>
-            </a:r>
             <a:endParaRPr/>
           </a:p>
         </p:txBody>
@@ -8172,7 +8163,7 @@
         <p:spPr>
           <a:xfrm>
             <a:off x="13587460" y="1806760"/>
-            <a:ext cx="2152563" cy="740972"/>
+            <a:ext cx="2152563" cy="356251"/>
           </a:xfrm>
           <a:prstGeom prst="rect">
             <a:avLst/>
@@ -8208,13 +8199,6 @@
           </a:lstStyle>
           <a:p>
             <a:pPr defTabSz="914400"/>
-            <a:r>
-              <a:rPr lang="nl-NL"/>
-              <a:t>{career_min}</a:t>
-            </a:r>
-          </a:p>
-          <a:p>
-            <a:pPr defTabSz="914400"/>
             <a:endParaRPr/>
           </a:p>
         </p:txBody>
@@ -8264,10 +8248,6 @@
           </a:lstStyle>
           <a:p>
             <a:pPr defTabSz="914400"/>
-            <a:r>
-              <a:rPr lang="nl-NL"/>
-              <a:t>{career_g}</a:t>
-            </a:r>
             <a:endParaRPr/>
           </a:p>
         </p:txBody>
@@ -8317,10 +8297,6 @@
           </a:lstStyle>
           <a:p>
             <a:pPr defTabSz="914400"/>
-            <a:r>
-              <a:rPr lang="nl-NL"/>
-              <a:t>{career_a}</a:t>
-            </a:r>
             <a:endParaRPr/>
           </a:p>
         </p:txBody>
@@ -9206,10 +9182,6 @@
             </a:lvl1pPr>
           </a:lstStyle>
           <a:p>
-            <a:r>
-              <a:rPr lang="nl-NL"/>
-              <a:t>{MV}</a:t>
-            </a:r>
             <a:endParaRPr/>
           </a:p>
         </p:txBody>

--- a/TemplateScoutingsRapport.pptx
+++ b/TemplateScoutingsRapport.pptx
@@ -10183,6 +10183,64 @@
             <a:r>
               <a:t>Xxxx</a:t>
             </a:r>
+          </a:p>
+        </p:txBody>
+      </p:sp>
+      <p:sp>
+        <p:nvSpPr>
+          <p:cNvPr id="3" name="Xxxx">
+            <a:extLst>
+              <a:ext uri="{FF2B5EF4-FFF2-40B4-BE49-F238E27FC236}">
+                <a16:creationId xmlns:a16="http://schemas.microsoft.com/office/drawing/2014/main" id="{DAD88B43-E9E9-0355-7D6A-DC26BE0017BC}"/>
+              </a:ext>
+            </a:extLst>
+          </p:cNvPr>
+          <p:cNvSpPr txBox="1"/>
+          <p:nvPr/>
+        </p:nvSpPr>
+        <p:spPr>
+          <a:xfrm>
+            <a:off x="19680106" y="3329846"/>
+            <a:ext cx="3576987" cy="397082"/>
+          </a:xfrm>
+          <a:prstGeom prst="rect">
+            <a:avLst/>
+          </a:prstGeom>
+          <a:ln w="12700">
+            <a:miter lim="400000"/>
+          </a:ln>
+          <a:extLst>
+            <a:ext uri="{C572A759-6A51-4108-AA02-DFA0A04FC94B}">
+              <ma14:wrappingTextBoxFlag xmlns:ma14="http://schemas.microsoft.com/office/mac/drawingml/2011/main" xmlns:a14="http://schemas.microsoft.com/office/drawing/2010/main" xmlns:m="http://schemas.openxmlformats.org/officeDocument/2006/math" xmlns="" val="1"/>
+            </a:ext>
+          </a:extLst>
+        </p:spPr>
+        <p:txBody>
+          <a:bodyPr lIns="60959" tIns="60959" rIns="60959" bIns="60959" anchor="ctr">
+            <a:spAutoFit/>
+          </a:bodyPr>
+          <a:lstStyle>
+            <a:lvl1pPr algn="ctr" defTabSz="1219200">
+              <a:lnSpc>
+                <a:spcPts val="2100"/>
+              </a:lnSpc>
+              <a:spcBef>
+                <a:spcPts val="0"/>
+              </a:spcBef>
+              <a:defRPr sz="2000" b="1">
+                <a:latin typeface="Cabin Medium"/>
+                <a:ea typeface="Cabin Medium"/>
+                <a:cs typeface="Cabin Medium"/>
+                <a:sym typeface="Cabin Medium"/>
+              </a:defRPr>
+            </a:lvl1pPr>
+          </a:lstStyle>
+          <a:p>
+            <a:r>
+              <a:rPr lang="nl-NL"/>
+              <a:t>{MV}</a:t>
+            </a:r>
+            <a:endParaRPr/>
           </a:p>
         </p:txBody>
       </p:sp>
